--- a/ゲーム科1年/00_前期/プログラミングⅠ/14_ここまでの補足.pptx
+++ b/ゲーム科1年/00_前期/プログラミングⅠ/14_ここまでの補足.pptx
@@ -265,7 +265,7 @@
           <a:p>
             <a:fld id="{E9CC885B-4903-4D54-9A93-00025F12DED9}" type="datetimeFigureOut">
               <a:rPr kumimoji="1" lang="ja-JP" altLang="en-US" smtClean="0"/>
-              <a:t>2024/11/15</a:t>
+              <a:t>2026/2/24</a:t>
             </a:fld>
             <a:endParaRPr kumimoji="1" lang="ja-JP" altLang="en-US"/>
           </a:p>
@@ -495,7 +495,7 @@
           <a:p>
             <a:fld id="{E9CC885B-4903-4D54-9A93-00025F12DED9}" type="datetimeFigureOut">
               <a:rPr kumimoji="1" lang="ja-JP" altLang="en-US" smtClean="0"/>
-              <a:t>2024/11/15</a:t>
+              <a:t>2026/2/24</a:t>
             </a:fld>
             <a:endParaRPr kumimoji="1" lang="ja-JP" altLang="en-US"/>
           </a:p>
@@ -735,7 +735,7 @@
           <a:p>
             <a:fld id="{E9CC885B-4903-4D54-9A93-00025F12DED9}" type="datetimeFigureOut">
               <a:rPr kumimoji="1" lang="ja-JP" altLang="en-US" smtClean="0"/>
-              <a:t>2024/11/15</a:t>
+              <a:t>2026/2/24</a:t>
             </a:fld>
             <a:endParaRPr kumimoji="1" lang="ja-JP" altLang="en-US"/>
           </a:p>
@@ -965,7 +965,7 @@
           <a:p>
             <a:fld id="{E9CC885B-4903-4D54-9A93-00025F12DED9}" type="datetimeFigureOut">
               <a:rPr kumimoji="1" lang="ja-JP" altLang="en-US" smtClean="0"/>
-              <a:t>2024/11/15</a:t>
+              <a:t>2026/2/24</a:t>
             </a:fld>
             <a:endParaRPr kumimoji="1" lang="ja-JP" altLang="en-US"/>
           </a:p>
@@ -1240,7 +1240,7 @@
           <a:p>
             <a:fld id="{E9CC885B-4903-4D54-9A93-00025F12DED9}" type="datetimeFigureOut">
               <a:rPr kumimoji="1" lang="ja-JP" altLang="en-US" smtClean="0"/>
-              <a:t>2024/11/15</a:t>
+              <a:t>2026/2/24</a:t>
             </a:fld>
             <a:endParaRPr kumimoji="1" lang="ja-JP" altLang="en-US"/>
           </a:p>
@@ -1569,7 +1569,7 @@
           <a:p>
             <a:fld id="{E9CC885B-4903-4D54-9A93-00025F12DED9}" type="datetimeFigureOut">
               <a:rPr kumimoji="1" lang="ja-JP" altLang="en-US" smtClean="0"/>
-              <a:t>2024/11/15</a:t>
+              <a:t>2026/2/24</a:t>
             </a:fld>
             <a:endParaRPr kumimoji="1" lang="ja-JP" altLang="en-US"/>
           </a:p>
@@ -2045,7 +2045,7 @@
           <a:p>
             <a:fld id="{E9CC885B-4903-4D54-9A93-00025F12DED9}" type="datetimeFigureOut">
               <a:rPr kumimoji="1" lang="ja-JP" altLang="en-US" smtClean="0"/>
-              <a:t>2024/11/15</a:t>
+              <a:t>2026/2/24</a:t>
             </a:fld>
             <a:endParaRPr kumimoji="1" lang="ja-JP" altLang="en-US"/>
           </a:p>
@@ -2186,7 +2186,7 @@
           <a:p>
             <a:fld id="{E9CC885B-4903-4D54-9A93-00025F12DED9}" type="datetimeFigureOut">
               <a:rPr kumimoji="1" lang="ja-JP" altLang="en-US" smtClean="0"/>
-              <a:t>2024/11/15</a:t>
+              <a:t>2026/2/24</a:t>
             </a:fld>
             <a:endParaRPr kumimoji="1" lang="ja-JP" altLang="en-US"/>
           </a:p>
@@ -2299,7 +2299,7 @@
           <a:p>
             <a:fld id="{E9CC885B-4903-4D54-9A93-00025F12DED9}" type="datetimeFigureOut">
               <a:rPr kumimoji="1" lang="ja-JP" altLang="en-US" smtClean="0"/>
-              <a:t>2024/11/15</a:t>
+              <a:t>2026/2/24</a:t>
             </a:fld>
             <a:endParaRPr kumimoji="1" lang="ja-JP" altLang="en-US"/>
           </a:p>
@@ -2642,7 +2642,7 @@
           <a:p>
             <a:fld id="{E9CC885B-4903-4D54-9A93-00025F12DED9}" type="datetimeFigureOut">
               <a:rPr kumimoji="1" lang="ja-JP" altLang="en-US" smtClean="0"/>
-              <a:t>2024/11/15</a:t>
+              <a:t>2026/2/24</a:t>
             </a:fld>
             <a:endParaRPr kumimoji="1" lang="ja-JP" altLang="en-US"/>
           </a:p>
@@ -2930,7 +2930,7 @@
           <a:p>
             <a:fld id="{E9CC885B-4903-4D54-9A93-00025F12DED9}" type="datetimeFigureOut">
               <a:rPr kumimoji="1" lang="ja-JP" altLang="en-US" smtClean="0"/>
-              <a:t>2024/11/15</a:t>
+              <a:t>2026/2/24</a:t>
             </a:fld>
             <a:endParaRPr kumimoji="1" lang="ja-JP" altLang="en-US"/>
           </a:p>
@@ -3203,7 +3203,7 @@
           <a:p>
             <a:fld id="{E9CC885B-4903-4D54-9A93-00025F12DED9}" type="datetimeFigureOut">
               <a:rPr kumimoji="1" lang="ja-JP" altLang="en-US" smtClean="0"/>
-              <a:t>2024/11/15</a:t>
+              <a:t>2026/2/24</a:t>
             </a:fld>
             <a:endParaRPr kumimoji="1" lang="ja-JP" altLang="en-US"/>
           </a:p>
@@ -4437,7 +4437,7 @@
         <p:spPr>
           <a:xfrm>
             <a:off x="567542" y="491954"/>
-            <a:ext cx="1928733" cy="584775"/>
+            <a:ext cx="1311578" cy="584775"/>
           </a:xfrm>
           <a:prstGeom prst="rect">
             <a:avLst/>
@@ -4451,8 +4451,8 @@
           <a:lstStyle/>
           <a:p>
             <a:r>
-              <a:rPr lang="en-US" altLang="ja-JP" sz="3200" b="1" u="sng" dirty="0"/>
-              <a:t>continue</a:t>
+              <a:rPr kumimoji="1" lang="en-US" altLang="ja-JP" sz="3200" b="1" u="sng" dirty="0"/>
+              <a:t>break</a:t>
             </a:r>
             <a:endParaRPr kumimoji="1" lang="ja-JP" altLang="en-US" sz="3200" b="1" u="sng" dirty="0"/>
           </a:p>
